--- a/FitByte_AI_Content_Creator_Presentation.pptx
+++ b/FitByte_AI_Content_Creator_Presentation.pptx
@@ -5,20 +5,20 @@
     <p:sldMasterId id="2147483648" r:id="rId1"/>
   </p:sldMasterIdLst>
   <p:sldIdLst>
-    <p:sldId id="256" r:id="rId7"/>
-    <p:sldId id="257" r:id="rId8"/>
-    <p:sldId id="258" r:id="rId9"/>
-    <p:sldId id="259" r:id="rId10"/>
-    <p:sldId id="260" r:id="rId11"/>
-    <p:sldId id="261" r:id="rId12"/>
-    <p:sldId id="262" r:id="rId13"/>
-    <p:sldId id="263" r:id="rId14"/>
-    <p:sldId id="264" r:id="rId15"/>
-    <p:sldId id="265" r:id="rId16"/>
-    <p:sldId id="266" r:id="rId17"/>
-    <p:sldId id="267" r:id="rId18"/>
+    <p:sldId id="256" r:id="rId2"/>
+    <p:sldId id="257" r:id="rId3"/>
+    <p:sldId id="258" r:id="rId4"/>
+    <p:sldId id="259" r:id="rId5"/>
+    <p:sldId id="260" r:id="rId6"/>
+    <p:sldId id="261" r:id="rId7"/>
+    <p:sldId id="262" r:id="rId8"/>
+    <p:sldId id="263" r:id="rId9"/>
+    <p:sldId id="264" r:id="rId10"/>
+    <p:sldId id="265" r:id="rId11"/>
+    <p:sldId id="266" r:id="rId12"/>
+    <p:sldId id="267" r:id="rId13"/>
   </p:sldIdLst>
-  <p:sldSz cx="12188952" cy="6858000" type="screen4x3"/>
+  <p:sldSz cx="12188825" cy="6858000"/>
   <p:notesSz cx="6858000" cy="9144000"/>
   <p:defaultTextStyle>
     <a:defPPr>
@@ -115,6 +115,22 @@
       </a:defRPr>
     </a:lvl9pPr>
   </p:defaultTextStyle>
+  <p:extLst>
+    <p:ext uri="{EFAFB233-063F-42B5-8137-9DF3F51BA10A}">
+      <p15:sldGuideLst xmlns:p15="http://schemas.microsoft.com/office/powerpoint/2012/main">
+        <p15:guide id="1" orient="horz" pos="2160">
+          <p15:clr>
+            <a:srgbClr val="A4A3A4"/>
+          </p15:clr>
+        </p15:guide>
+        <p15:guide id="2" pos="2880">
+          <p15:clr>
+            <a:srgbClr val="A4A3A4"/>
+          </p15:clr>
+        </p15:guide>
+      </p15:sldGuideLst>
+    </p:ext>
+  </p:extLst>
 </p:presentation>
 </file>
 
@@ -156,10 +172,9 @@
           <a:lstStyle/>
           <a:p>
             <a:r>
-              <a:rPr lang="en-US" smtClean="0"/>
+              <a:rPr lang="en-US"/>
               <a:t>Click to edit Master title style</a:t>
             </a:r>
-            <a:endParaRPr lang="en-US"/>
           </a:p>
         </p:txBody>
       </p:sp>
@@ -275,10 +290,9 @@
           </a:lstStyle>
           <a:p>
             <a:r>
-              <a:rPr lang="en-US" smtClean="0"/>
+              <a:rPr lang="en-US"/>
               <a:t>Click to edit Master subtitle style</a:t>
             </a:r>
-            <a:endParaRPr lang="en-US"/>
           </a:p>
         </p:txBody>
       </p:sp>
@@ -299,7 +313,7 @@
           <a:p>
             <a:fld id="{5BCAD085-E8A6-8845-BD4E-CB4CCA059FC4}" type="datetimeFigureOut">
               <a:rPr lang="en-US" smtClean="0"/>
-              <a:t>1/27/13</a:t>
+              <a:t>5/5/2026</a:t>
             </a:fld>
             <a:endParaRPr lang="en-US"/>
           </a:p>
@@ -341,7 +355,7 @@
           <a:p>
             <a:fld id="{C1FF6DA9-008F-8B48-92A6-B652298478BF}" type="slidenum">
               <a:rPr lang="en-US" smtClean="0"/>
-              <a:t>‹#›</a:t>
+              <a:t>‹Nr.›</a:t>
             </a:fld>
             <a:endParaRPr lang="en-US"/>
           </a:p>
@@ -393,10 +407,9 @@
           <a:lstStyle/>
           <a:p>
             <a:r>
-              <a:rPr lang="en-US" smtClean="0"/>
+              <a:rPr lang="en-US"/>
               <a:t>Click to edit Master title style</a:t>
             </a:r>
-            <a:endParaRPr lang="en-US"/>
           </a:p>
         </p:txBody>
       </p:sp>
@@ -417,38 +430,37 @@
           <a:p>
             <a:pPr lvl="0"/>
             <a:r>
-              <a:rPr lang="en-US" smtClean="0"/>
+              <a:rPr lang="en-US"/>
               <a:t>Click to edit Master text styles</a:t>
             </a:r>
           </a:p>
           <a:p>
             <a:pPr lvl="1"/>
             <a:r>
-              <a:rPr lang="en-US" smtClean="0"/>
+              <a:rPr lang="en-US"/>
               <a:t>Second level</a:t>
             </a:r>
           </a:p>
           <a:p>
             <a:pPr lvl="2"/>
             <a:r>
-              <a:rPr lang="en-US" smtClean="0"/>
+              <a:rPr lang="en-US"/>
               <a:t>Third level</a:t>
             </a:r>
           </a:p>
           <a:p>
             <a:pPr lvl="3"/>
             <a:r>
-              <a:rPr lang="en-US" smtClean="0"/>
+              <a:rPr lang="en-US"/>
               <a:t>Fourth level</a:t>
             </a:r>
           </a:p>
           <a:p>
             <a:pPr lvl="4"/>
             <a:r>
-              <a:rPr lang="en-US" smtClean="0"/>
+              <a:rPr lang="en-US"/>
               <a:t>Fifth level</a:t>
             </a:r>
-            <a:endParaRPr lang="en-US"/>
           </a:p>
         </p:txBody>
       </p:sp>
@@ -469,7 +481,7 @@
           <a:p>
             <a:fld id="{5BCAD085-E8A6-8845-BD4E-CB4CCA059FC4}" type="datetimeFigureOut">
               <a:rPr lang="en-US" smtClean="0"/>
-              <a:t>1/27/13</a:t>
+              <a:t>5/5/2026</a:t>
             </a:fld>
             <a:endParaRPr lang="en-US"/>
           </a:p>
@@ -511,7 +523,7 @@
           <a:p>
             <a:fld id="{C1FF6DA9-008F-8B48-92A6-B652298478BF}" type="slidenum">
               <a:rPr lang="en-US" smtClean="0"/>
-              <a:t>‹#›</a:t>
+              <a:t>‹Nr.›</a:t>
             </a:fld>
             <a:endParaRPr lang="en-US"/>
           </a:p>
@@ -568,10 +580,9 @@
           <a:lstStyle/>
           <a:p>
             <a:r>
-              <a:rPr lang="en-US" smtClean="0"/>
+              <a:rPr lang="en-US"/>
               <a:t>Click to edit Master title style</a:t>
             </a:r>
-            <a:endParaRPr lang="en-US"/>
           </a:p>
         </p:txBody>
       </p:sp>
@@ -597,38 +608,37 @@
           <a:p>
             <a:pPr lvl="0"/>
             <a:r>
-              <a:rPr lang="en-US" smtClean="0"/>
+              <a:rPr lang="en-US"/>
               <a:t>Click to edit Master text styles</a:t>
             </a:r>
           </a:p>
           <a:p>
             <a:pPr lvl="1"/>
             <a:r>
-              <a:rPr lang="en-US" smtClean="0"/>
+              <a:rPr lang="en-US"/>
               <a:t>Second level</a:t>
             </a:r>
           </a:p>
           <a:p>
             <a:pPr lvl="2"/>
             <a:r>
-              <a:rPr lang="en-US" smtClean="0"/>
+              <a:rPr lang="en-US"/>
               <a:t>Third level</a:t>
             </a:r>
           </a:p>
           <a:p>
             <a:pPr lvl="3"/>
             <a:r>
-              <a:rPr lang="en-US" smtClean="0"/>
+              <a:rPr lang="en-US"/>
               <a:t>Fourth level</a:t>
             </a:r>
           </a:p>
           <a:p>
             <a:pPr lvl="4"/>
             <a:r>
-              <a:rPr lang="en-US" smtClean="0"/>
+              <a:rPr lang="en-US"/>
               <a:t>Fifth level</a:t>
             </a:r>
-            <a:endParaRPr lang="en-US"/>
           </a:p>
         </p:txBody>
       </p:sp>
@@ -649,7 +659,7 @@
           <a:p>
             <a:fld id="{5BCAD085-E8A6-8845-BD4E-CB4CCA059FC4}" type="datetimeFigureOut">
               <a:rPr lang="en-US" smtClean="0"/>
-              <a:t>1/27/13</a:t>
+              <a:t>5/5/2026</a:t>
             </a:fld>
             <a:endParaRPr lang="en-US"/>
           </a:p>
@@ -691,7 +701,7 @@
           <a:p>
             <a:fld id="{C1FF6DA9-008F-8B48-92A6-B652298478BF}" type="slidenum">
               <a:rPr lang="en-US" smtClean="0"/>
-              <a:t>‹#›</a:t>
+              <a:t>‹Nr.›</a:t>
             </a:fld>
             <a:endParaRPr lang="en-US"/>
           </a:p>
@@ -743,10 +753,9 @@
           <a:lstStyle/>
           <a:p>
             <a:r>
-              <a:rPr lang="en-US" smtClean="0"/>
+              <a:rPr lang="en-US"/>
               <a:t>Click to edit Master title style</a:t>
             </a:r>
-            <a:endParaRPr lang="en-US"/>
           </a:p>
         </p:txBody>
       </p:sp>
@@ -767,38 +776,37 @@
           <a:p>
             <a:pPr lvl="0"/>
             <a:r>
-              <a:rPr lang="en-US" smtClean="0"/>
+              <a:rPr lang="en-US"/>
               <a:t>Click to edit Master text styles</a:t>
             </a:r>
           </a:p>
           <a:p>
             <a:pPr lvl="1"/>
             <a:r>
-              <a:rPr lang="en-US" smtClean="0"/>
+              <a:rPr lang="en-US"/>
               <a:t>Second level</a:t>
             </a:r>
           </a:p>
           <a:p>
             <a:pPr lvl="2"/>
             <a:r>
-              <a:rPr lang="en-US" smtClean="0"/>
+              <a:rPr lang="en-US"/>
               <a:t>Third level</a:t>
             </a:r>
           </a:p>
           <a:p>
             <a:pPr lvl="3"/>
             <a:r>
-              <a:rPr lang="en-US" smtClean="0"/>
+              <a:rPr lang="en-US"/>
               <a:t>Fourth level</a:t>
             </a:r>
           </a:p>
           <a:p>
             <a:pPr lvl="4"/>
             <a:r>
-              <a:rPr lang="en-US" smtClean="0"/>
+              <a:rPr lang="en-US"/>
               <a:t>Fifth level</a:t>
             </a:r>
-            <a:endParaRPr lang="en-US"/>
           </a:p>
         </p:txBody>
       </p:sp>
@@ -819,7 +827,7 @@
           <a:p>
             <a:fld id="{5BCAD085-E8A6-8845-BD4E-CB4CCA059FC4}" type="datetimeFigureOut">
               <a:rPr lang="en-US" smtClean="0"/>
-              <a:t>1/27/13</a:t>
+              <a:t>5/5/2026</a:t>
             </a:fld>
             <a:endParaRPr lang="en-US"/>
           </a:p>
@@ -861,7 +869,7 @@
           <a:p>
             <a:fld id="{C1FF6DA9-008F-8B48-92A6-B652298478BF}" type="slidenum">
               <a:rPr lang="en-US" smtClean="0"/>
-              <a:t>‹#›</a:t>
+              <a:t>‹Nr.›</a:t>
             </a:fld>
             <a:endParaRPr lang="en-US"/>
           </a:p>
@@ -922,10 +930,9 @@
           </a:lstStyle>
           <a:p>
             <a:r>
-              <a:rPr lang="en-US" smtClean="0"/>
+              <a:rPr lang="en-US"/>
               <a:t>Click to edit Master title style</a:t>
             </a:r>
-            <a:endParaRPr lang="en-US"/>
           </a:p>
         </p:txBody>
       </p:sp>
@@ -1042,7 +1049,7 @@
           <a:p>
             <a:pPr lvl="0"/>
             <a:r>
-              <a:rPr lang="en-US" smtClean="0"/>
+              <a:rPr lang="en-US"/>
               <a:t>Click to edit Master text styles</a:t>
             </a:r>
           </a:p>
@@ -1065,7 +1072,7 @@
           <a:p>
             <a:fld id="{5BCAD085-E8A6-8845-BD4E-CB4CCA059FC4}" type="datetimeFigureOut">
               <a:rPr lang="en-US" smtClean="0"/>
-              <a:t>1/27/13</a:t>
+              <a:t>5/5/2026</a:t>
             </a:fld>
             <a:endParaRPr lang="en-US"/>
           </a:p>
@@ -1107,7 +1114,7 @@
           <a:p>
             <a:fld id="{C1FF6DA9-008F-8B48-92A6-B652298478BF}" type="slidenum">
               <a:rPr lang="en-US" smtClean="0"/>
-              <a:t>‹#›</a:t>
+              <a:t>‹Nr.›</a:t>
             </a:fld>
             <a:endParaRPr lang="en-US"/>
           </a:p>
@@ -1159,10 +1166,9 @@
           <a:lstStyle/>
           <a:p>
             <a:r>
-              <a:rPr lang="en-US" smtClean="0"/>
+              <a:rPr lang="en-US"/>
               <a:t>Click to edit Master title style</a:t>
             </a:r>
-            <a:endParaRPr lang="en-US"/>
           </a:p>
         </p:txBody>
       </p:sp>
@@ -1216,38 +1222,37 @@
           <a:p>
             <a:pPr lvl="0"/>
             <a:r>
-              <a:rPr lang="en-US" smtClean="0"/>
+              <a:rPr lang="en-US"/>
               <a:t>Click to edit Master text styles</a:t>
             </a:r>
           </a:p>
           <a:p>
             <a:pPr lvl="1"/>
             <a:r>
-              <a:rPr lang="en-US" smtClean="0"/>
+              <a:rPr lang="en-US"/>
               <a:t>Second level</a:t>
             </a:r>
           </a:p>
           <a:p>
             <a:pPr lvl="2"/>
             <a:r>
-              <a:rPr lang="en-US" smtClean="0"/>
+              <a:rPr lang="en-US"/>
               <a:t>Third level</a:t>
             </a:r>
           </a:p>
           <a:p>
             <a:pPr lvl="3"/>
             <a:r>
-              <a:rPr lang="en-US" smtClean="0"/>
+              <a:rPr lang="en-US"/>
               <a:t>Fourth level</a:t>
             </a:r>
           </a:p>
           <a:p>
             <a:pPr lvl="4"/>
             <a:r>
-              <a:rPr lang="en-US" smtClean="0"/>
+              <a:rPr lang="en-US"/>
               <a:t>Fifth level</a:t>
             </a:r>
-            <a:endParaRPr lang="en-US"/>
           </a:p>
         </p:txBody>
       </p:sp>
@@ -1301,38 +1306,37 @@
           <a:p>
             <a:pPr lvl="0"/>
             <a:r>
-              <a:rPr lang="en-US" smtClean="0"/>
+              <a:rPr lang="en-US"/>
               <a:t>Click to edit Master text styles</a:t>
             </a:r>
           </a:p>
           <a:p>
             <a:pPr lvl="1"/>
             <a:r>
-              <a:rPr lang="en-US" smtClean="0"/>
+              <a:rPr lang="en-US"/>
               <a:t>Second level</a:t>
             </a:r>
           </a:p>
           <a:p>
             <a:pPr lvl="2"/>
             <a:r>
-              <a:rPr lang="en-US" smtClean="0"/>
+              <a:rPr lang="en-US"/>
               <a:t>Third level</a:t>
             </a:r>
           </a:p>
           <a:p>
             <a:pPr lvl="3"/>
             <a:r>
-              <a:rPr lang="en-US" smtClean="0"/>
+              <a:rPr lang="en-US"/>
               <a:t>Fourth level</a:t>
             </a:r>
           </a:p>
           <a:p>
             <a:pPr lvl="4"/>
             <a:r>
-              <a:rPr lang="en-US" smtClean="0"/>
+              <a:rPr lang="en-US"/>
               <a:t>Fifth level</a:t>
             </a:r>
-            <a:endParaRPr lang="en-US"/>
           </a:p>
         </p:txBody>
       </p:sp>
@@ -1353,7 +1357,7 @@
           <a:p>
             <a:fld id="{5BCAD085-E8A6-8845-BD4E-CB4CCA059FC4}" type="datetimeFigureOut">
               <a:rPr lang="en-US" smtClean="0"/>
-              <a:t>1/27/13</a:t>
+              <a:t>5/5/2026</a:t>
             </a:fld>
             <a:endParaRPr lang="en-US"/>
           </a:p>
@@ -1395,7 +1399,7 @@
           <a:p>
             <a:fld id="{C1FF6DA9-008F-8B48-92A6-B652298478BF}" type="slidenum">
               <a:rPr lang="en-US" smtClean="0"/>
-              <a:t>‹#›</a:t>
+              <a:t>‹Nr.›</a:t>
             </a:fld>
             <a:endParaRPr lang="en-US"/>
           </a:p>
@@ -1451,10 +1455,9 @@
           </a:lstStyle>
           <a:p>
             <a:r>
-              <a:rPr lang="en-US" smtClean="0"/>
+              <a:rPr lang="en-US"/>
               <a:t>Click to edit Master title style</a:t>
             </a:r>
-            <a:endParaRPr lang="en-US"/>
           </a:p>
         </p:txBody>
       </p:sp>
@@ -1517,7 +1520,7 @@
           <a:p>
             <a:pPr lvl="0"/>
             <a:r>
-              <a:rPr lang="en-US" smtClean="0"/>
+              <a:rPr lang="en-US"/>
               <a:t>Click to edit Master text styles</a:t>
             </a:r>
           </a:p>
@@ -1573,38 +1576,37 @@
           <a:p>
             <a:pPr lvl="0"/>
             <a:r>
-              <a:rPr lang="en-US" smtClean="0"/>
+              <a:rPr lang="en-US"/>
               <a:t>Click to edit Master text styles</a:t>
             </a:r>
           </a:p>
           <a:p>
             <a:pPr lvl="1"/>
             <a:r>
-              <a:rPr lang="en-US" smtClean="0"/>
+              <a:rPr lang="en-US"/>
               <a:t>Second level</a:t>
             </a:r>
           </a:p>
           <a:p>
             <a:pPr lvl="2"/>
             <a:r>
-              <a:rPr lang="en-US" smtClean="0"/>
+              <a:rPr lang="en-US"/>
               <a:t>Third level</a:t>
             </a:r>
           </a:p>
           <a:p>
             <a:pPr lvl="3"/>
             <a:r>
-              <a:rPr lang="en-US" smtClean="0"/>
+              <a:rPr lang="en-US"/>
               <a:t>Fourth level</a:t>
             </a:r>
           </a:p>
           <a:p>
             <a:pPr lvl="4"/>
             <a:r>
-              <a:rPr lang="en-US" smtClean="0"/>
+              <a:rPr lang="en-US"/>
               <a:t>Fifth level</a:t>
             </a:r>
-            <a:endParaRPr lang="en-US"/>
           </a:p>
         </p:txBody>
       </p:sp>
@@ -1667,7 +1669,7 @@
           <a:p>
             <a:pPr lvl="0"/>
             <a:r>
-              <a:rPr lang="en-US" smtClean="0"/>
+              <a:rPr lang="en-US"/>
               <a:t>Click to edit Master text styles</a:t>
             </a:r>
           </a:p>
@@ -1723,38 +1725,37 @@
           <a:p>
             <a:pPr lvl="0"/>
             <a:r>
-              <a:rPr lang="en-US" smtClean="0"/>
+              <a:rPr lang="en-US"/>
               <a:t>Click to edit Master text styles</a:t>
             </a:r>
           </a:p>
           <a:p>
             <a:pPr lvl="1"/>
             <a:r>
-              <a:rPr lang="en-US" smtClean="0"/>
+              <a:rPr lang="en-US"/>
               <a:t>Second level</a:t>
             </a:r>
           </a:p>
           <a:p>
             <a:pPr lvl="2"/>
             <a:r>
-              <a:rPr lang="en-US" smtClean="0"/>
+              <a:rPr lang="en-US"/>
               <a:t>Third level</a:t>
             </a:r>
           </a:p>
           <a:p>
             <a:pPr lvl="3"/>
             <a:r>
-              <a:rPr lang="en-US" smtClean="0"/>
+              <a:rPr lang="en-US"/>
               <a:t>Fourth level</a:t>
             </a:r>
           </a:p>
           <a:p>
             <a:pPr lvl="4"/>
             <a:r>
-              <a:rPr lang="en-US" smtClean="0"/>
+              <a:rPr lang="en-US"/>
               <a:t>Fifth level</a:t>
             </a:r>
-            <a:endParaRPr lang="en-US"/>
           </a:p>
         </p:txBody>
       </p:sp>
@@ -1775,7 +1776,7 @@
           <a:p>
             <a:fld id="{5BCAD085-E8A6-8845-BD4E-CB4CCA059FC4}" type="datetimeFigureOut">
               <a:rPr lang="en-US" smtClean="0"/>
-              <a:t>1/27/13</a:t>
+              <a:t>5/5/2026</a:t>
             </a:fld>
             <a:endParaRPr lang="en-US"/>
           </a:p>
@@ -1817,7 +1818,7 @@
           <a:p>
             <a:fld id="{C1FF6DA9-008F-8B48-92A6-B652298478BF}" type="slidenum">
               <a:rPr lang="en-US" smtClean="0"/>
-              <a:t>‹#›</a:t>
+              <a:t>‹Nr.›</a:t>
             </a:fld>
             <a:endParaRPr lang="en-US"/>
           </a:p>
@@ -1869,10 +1870,9 @@
           <a:lstStyle/>
           <a:p>
             <a:r>
-              <a:rPr lang="en-US" smtClean="0"/>
+              <a:rPr lang="en-US"/>
               <a:t>Click to edit Master title style</a:t>
             </a:r>
-            <a:endParaRPr lang="en-US"/>
           </a:p>
         </p:txBody>
       </p:sp>
@@ -1893,7 +1893,7 @@
           <a:p>
             <a:fld id="{5BCAD085-E8A6-8845-BD4E-CB4CCA059FC4}" type="datetimeFigureOut">
               <a:rPr lang="en-US" smtClean="0"/>
-              <a:t>1/27/13</a:t>
+              <a:t>5/5/2026</a:t>
             </a:fld>
             <a:endParaRPr lang="en-US"/>
           </a:p>
@@ -1935,7 +1935,7 @@
           <a:p>
             <a:fld id="{C1FF6DA9-008F-8B48-92A6-B652298478BF}" type="slidenum">
               <a:rPr lang="en-US" smtClean="0"/>
-              <a:t>‹#›</a:t>
+              <a:t>‹Nr.›</a:t>
             </a:fld>
             <a:endParaRPr lang="en-US"/>
           </a:p>
@@ -1988,7 +1988,7 @@
           <a:p>
             <a:fld id="{5BCAD085-E8A6-8845-BD4E-CB4CCA059FC4}" type="datetimeFigureOut">
               <a:rPr lang="en-US" smtClean="0"/>
-              <a:t>1/27/13</a:t>
+              <a:t>5/5/2026</a:t>
             </a:fld>
             <a:endParaRPr lang="en-US"/>
           </a:p>
@@ -2030,7 +2030,7 @@
           <a:p>
             <a:fld id="{C1FF6DA9-008F-8B48-92A6-B652298478BF}" type="slidenum">
               <a:rPr lang="en-US" smtClean="0"/>
-              <a:t>‹#›</a:t>
+              <a:t>‹Nr.›</a:t>
             </a:fld>
             <a:endParaRPr lang="en-US"/>
           </a:p>
@@ -2091,10 +2091,9 @@
           </a:lstStyle>
           <a:p>
             <a:r>
-              <a:rPr lang="en-US" smtClean="0"/>
+              <a:rPr lang="en-US"/>
               <a:t>Click to edit Master title style</a:t>
             </a:r>
-            <a:endParaRPr lang="en-US"/>
           </a:p>
         </p:txBody>
       </p:sp>
@@ -2148,38 +2147,37 @@
           <a:p>
             <a:pPr lvl="0"/>
             <a:r>
-              <a:rPr lang="en-US" smtClean="0"/>
+              <a:rPr lang="en-US"/>
               <a:t>Click to edit Master text styles</a:t>
             </a:r>
           </a:p>
           <a:p>
             <a:pPr lvl="1"/>
             <a:r>
-              <a:rPr lang="en-US" smtClean="0"/>
+              <a:rPr lang="en-US"/>
               <a:t>Second level</a:t>
             </a:r>
           </a:p>
           <a:p>
             <a:pPr lvl="2"/>
             <a:r>
-              <a:rPr lang="en-US" smtClean="0"/>
+              <a:rPr lang="en-US"/>
               <a:t>Third level</a:t>
             </a:r>
           </a:p>
           <a:p>
             <a:pPr lvl="3"/>
             <a:r>
-              <a:rPr lang="en-US" smtClean="0"/>
+              <a:rPr lang="en-US"/>
               <a:t>Fourth level</a:t>
             </a:r>
           </a:p>
           <a:p>
             <a:pPr lvl="4"/>
             <a:r>
-              <a:rPr lang="en-US" smtClean="0"/>
+              <a:rPr lang="en-US"/>
               <a:t>Fifth level</a:t>
             </a:r>
-            <a:endParaRPr lang="en-US"/>
           </a:p>
         </p:txBody>
       </p:sp>
@@ -2242,7 +2240,7 @@
           <a:p>
             <a:pPr lvl="0"/>
             <a:r>
-              <a:rPr lang="en-US" smtClean="0"/>
+              <a:rPr lang="en-US"/>
               <a:t>Click to edit Master text styles</a:t>
             </a:r>
           </a:p>
@@ -2265,7 +2263,7 @@
           <a:p>
             <a:fld id="{5BCAD085-E8A6-8845-BD4E-CB4CCA059FC4}" type="datetimeFigureOut">
               <a:rPr lang="en-US" smtClean="0"/>
-              <a:t>1/27/13</a:t>
+              <a:t>5/5/2026</a:t>
             </a:fld>
             <a:endParaRPr lang="en-US"/>
           </a:p>
@@ -2307,7 +2305,7 @@
           <a:p>
             <a:fld id="{C1FF6DA9-008F-8B48-92A6-B652298478BF}" type="slidenum">
               <a:rPr lang="en-US" smtClean="0"/>
-              <a:t>‹#›</a:t>
+              <a:t>‹Nr.›</a:t>
             </a:fld>
             <a:endParaRPr lang="en-US"/>
           </a:p>
@@ -2368,10 +2366,9 @@
           </a:lstStyle>
           <a:p>
             <a:r>
-              <a:rPr lang="en-US" smtClean="0"/>
+              <a:rPr lang="en-US"/>
               <a:t>Click to edit Master title style</a:t>
             </a:r>
-            <a:endParaRPr lang="en-US"/>
           </a:p>
         </p:txBody>
       </p:sp>
@@ -2495,7 +2492,7 @@
           <a:p>
             <a:pPr lvl="0"/>
             <a:r>
-              <a:rPr lang="en-US" smtClean="0"/>
+              <a:rPr lang="en-US"/>
               <a:t>Click to edit Master text styles</a:t>
             </a:r>
           </a:p>
@@ -2518,7 +2515,7 @@
           <a:p>
             <a:fld id="{5BCAD085-E8A6-8845-BD4E-CB4CCA059FC4}" type="datetimeFigureOut">
               <a:rPr lang="en-US" smtClean="0"/>
-              <a:t>1/27/13</a:t>
+              <a:t>5/5/2026</a:t>
             </a:fld>
             <a:endParaRPr lang="en-US"/>
           </a:p>
@@ -2560,7 +2557,7 @@
           <a:p>
             <a:fld id="{C1FF6DA9-008F-8B48-92A6-B652298478BF}" type="slidenum">
               <a:rPr lang="en-US" smtClean="0"/>
-              <a:t>‹#›</a:t>
+              <a:t>‹Nr.›</a:t>
             </a:fld>
             <a:endParaRPr lang="en-US"/>
           </a:p>
@@ -2627,10 +2624,9 @@
           <a:lstStyle/>
           <a:p>
             <a:r>
-              <a:rPr lang="en-US" smtClean="0"/>
+              <a:rPr lang="en-US"/>
               <a:t>Click to edit Master title style</a:t>
             </a:r>
-            <a:endParaRPr lang="en-US"/>
           </a:p>
         </p:txBody>
       </p:sp>
@@ -2661,38 +2657,37 @@
           <a:p>
             <a:pPr lvl="0"/>
             <a:r>
-              <a:rPr lang="en-US" smtClean="0"/>
+              <a:rPr lang="en-US"/>
               <a:t>Click to edit Master text styles</a:t>
             </a:r>
           </a:p>
           <a:p>
             <a:pPr lvl="1"/>
             <a:r>
-              <a:rPr lang="en-US" smtClean="0"/>
+              <a:rPr lang="en-US"/>
               <a:t>Second level</a:t>
             </a:r>
           </a:p>
           <a:p>
             <a:pPr lvl="2"/>
             <a:r>
-              <a:rPr lang="en-US" smtClean="0"/>
+              <a:rPr lang="en-US"/>
               <a:t>Third level</a:t>
             </a:r>
           </a:p>
           <a:p>
             <a:pPr lvl="3"/>
             <a:r>
-              <a:rPr lang="en-US" smtClean="0"/>
+              <a:rPr lang="en-US"/>
               <a:t>Fourth level</a:t>
             </a:r>
           </a:p>
           <a:p>
             <a:pPr lvl="4"/>
             <a:r>
-              <a:rPr lang="en-US" smtClean="0"/>
+              <a:rPr lang="en-US"/>
               <a:t>Fifth level</a:t>
             </a:r>
-            <a:endParaRPr lang="en-US"/>
           </a:p>
         </p:txBody>
       </p:sp>
@@ -2731,7 +2726,7 @@
           <a:p>
             <a:fld id="{5BCAD085-E8A6-8845-BD4E-CB4CCA059FC4}" type="datetimeFigureOut">
               <a:rPr lang="en-US" smtClean="0"/>
-              <a:t>1/27/13</a:t>
+              <a:t>5/5/2026</a:t>
             </a:fld>
             <a:endParaRPr lang="en-US"/>
           </a:p>
@@ -2809,7 +2804,7 @@
           <a:p>
             <a:fld id="{C1FF6DA9-008F-8B48-92A6-B652298478BF}" type="slidenum">
               <a:rPr lang="en-US" smtClean="0"/>
-              <a:t>‹#›</a:t>
+              <a:t>‹Nr.›</a:t>
             </a:fld>
             <a:endParaRPr lang="en-US"/>
           </a:p>
@@ -3090,7 +3085,7 @@
 </file>
 
 <file path=ppt/slides/slide1.xml><?xml version="1.0" encoding="utf-8"?>
-<p:sld xmlns:a="http://schemas.openxmlformats.org/drawingml/2006/main" xmlns:p="http://schemas.openxmlformats.org/presentationml/2006/main" xmlns:r="http://schemas.openxmlformats.org/officeDocument/2006/relationships">
+<p:sld xmlns:a="http://schemas.openxmlformats.org/drawingml/2006/main" xmlns:r="http://schemas.openxmlformats.org/officeDocument/2006/relationships" xmlns:p="http://schemas.openxmlformats.org/presentationml/2006/main">
   <p:cSld>
     <p:spTree>
       <p:nvGrpSpPr>
@@ -3098,7 +3093,14 @@
         <p:cNvGrpSpPr/>
         <p:nvPr/>
       </p:nvGrpSpPr>
-      <p:grpSpPr/>
+      <p:grpSpPr>
+        <a:xfrm>
+          <a:off x="0" y="0"/>
+          <a:ext cx="0" cy="0"/>
+          <a:chOff x="0" y="0"/>
+          <a:chExt cx="0" cy="0"/>
+        </a:xfrm>
+      </p:grpSpPr>
       <p:sp>
         <p:nvSpPr>
           <p:cNvPr id="2" name="Rectangle 1"/>
@@ -3139,6 +3141,7 @@
           <a:lstStyle/>
           <a:p>
             <a:pPr algn="ctr"/>
+            <a:endParaRPr/>
           </a:p>
         </p:txBody>
       </p:sp>
@@ -3182,6 +3185,7 @@
           <a:lstStyle/>
           <a:p>
             <a:pPr algn="ctr"/>
+            <a:endParaRPr/>
           </a:p>
         </p:txBody>
       </p:sp>
@@ -3264,7 +3268,7 @@
         <p:spPr>
           <a:xfrm>
             <a:off x="457200" y="3017520"/>
-            <a:ext cx="9144000" cy="548640"/>
+            <a:ext cx="5842000" cy="548640"/>
           </a:xfrm>
           <a:prstGeom prst="rect">
             <a:avLst/>
@@ -3330,6 +3334,7 @@
           <a:lstStyle/>
           <a:p>
             <a:pPr algn="ctr"/>
+            <a:endParaRPr/>
           </a:p>
         </p:txBody>
       </p:sp>
@@ -3443,6 +3448,7 @@
           <a:lstStyle/>
           <a:p>
             <a:pPr algn="ctr"/>
+            <a:endParaRPr/>
           </a:p>
         </p:txBody>
       </p:sp>
@@ -3486,6 +3492,7 @@
           <a:lstStyle/>
           <a:p>
             <a:pPr algn="ctr"/>
+            <a:endParaRPr/>
           </a:p>
         </p:txBody>
       </p:sp>
@@ -3529,6 +3536,7 @@
           <a:lstStyle/>
           <a:p>
             <a:pPr algn="ctr"/>
+            <a:endParaRPr/>
           </a:p>
         </p:txBody>
       </p:sp>
@@ -3572,6 +3580,7 @@
           <a:lstStyle/>
           <a:p>
             <a:pPr algn="ctr"/>
+            <a:endParaRPr/>
           </a:p>
         </p:txBody>
       </p:sp>
@@ -3615,6 +3624,7 @@
           <a:lstStyle/>
           <a:p>
             <a:pPr algn="ctr"/>
+            <a:endParaRPr/>
           </a:p>
         </p:txBody>
       </p:sp>
@@ -3658,6 +3668,7 @@
           <a:lstStyle/>
           <a:p>
             <a:pPr algn="ctr"/>
+            <a:endParaRPr/>
           </a:p>
         </p:txBody>
       </p:sp>
@@ -3701,6 +3712,7 @@
           <a:lstStyle/>
           <a:p>
             <a:pPr algn="ctr"/>
+            <a:endParaRPr/>
           </a:p>
         </p:txBody>
       </p:sp>
@@ -3744,6 +3756,7 @@
           <a:lstStyle/>
           <a:p>
             <a:pPr algn="ctr"/>
+            <a:endParaRPr/>
           </a:p>
         </p:txBody>
       </p:sp>
@@ -3787,6 +3800,7 @@
           <a:lstStyle/>
           <a:p>
             <a:pPr algn="ctr"/>
+            <a:endParaRPr/>
           </a:p>
         </p:txBody>
       </p:sp>
@@ -3830,6 +3844,7 @@
           <a:lstStyle/>
           <a:p>
             <a:pPr algn="ctr"/>
+            <a:endParaRPr/>
           </a:p>
         </p:txBody>
       </p:sp>
@@ -3873,6 +3888,7 @@
           <a:lstStyle/>
           <a:p>
             <a:pPr algn="ctr"/>
+            <a:endParaRPr/>
           </a:p>
         </p:txBody>
       </p:sp>
@@ -3916,6 +3932,7 @@
           <a:lstStyle/>
           <a:p>
             <a:pPr algn="ctr"/>
+            <a:endParaRPr/>
           </a:p>
         </p:txBody>
       </p:sp>
@@ -3959,6 +3976,7 @@
           <a:lstStyle/>
           <a:p>
             <a:pPr algn="ctr"/>
+            <a:endParaRPr/>
           </a:p>
         </p:txBody>
       </p:sp>
@@ -4002,6 +4020,7 @@
           <a:lstStyle/>
           <a:p>
             <a:pPr algn="ctr"/>
+            <a:endParaRPr/>
           </a:p>
         </p:txBody>
       </p:sp>
@@ -4045,6 +4064,7 @@
           <a:lstStyle/>
           <a:p>
             <a:pPr algn="ctr"/>
+            <a:endParaRPr/>
           </a:p>
         </p:txBody>
       </p:sp>
@@ -4088,6 +4108,7 @@
           <a:lstStyle/>
           <a:p>
             <a:pPr algn="ctr"/>
+            <a:endParaRPr/>
           </a:p>
         </p:txBody>
       </p:sp>
@@ -4131,6 +4152,7 @@
           <a:lstStyle/>
           <a:p>
             <a:pPr algn="ctr"/>
+            <a:endParaRPr/>
           </a:p>
         </p:txBody>
       </p:sp>
@@ -4174,6 +4196,7 @@
           <a:lstStyle/>
           <a:p>
             <a:pPr algn="ctr"/>
+            <a:endParaRPr/>
           </a:p>
         </p:txBody>
       </p:sp>
@@ -4217,6 +4240,7 @@
           <a:lstStyle/>
           <a:p>
             <a:pPr algn="ctr"/>
+            <a:endParaRPr/>
           </a:p>
         </p:txBody>
       </p:sp>
@@ -4260,6 +4284,7 @@
           <a:lstStyle/>
           <a:p>
             <a:pPr algn="ctr"/>
+            <a:endParaRPr/>
           </a:p>
         </p:txBody>
       </p:sp>
@@ -4303,6 +4328,7 @@
           <a:lstStyle/>
           <a:p>
             <a:pPr algn="ctr"/>
+            <a:endParaRPr/>
           </a:p>
         </p:txBody>
       </p:sp>
@@ -4346,6 +4372,7 @@
           <a:lstStyle/>
           <a:p>
             <a:pPr algn="ctr"/>
+            <a:endParaRPr/>
           </a:p>
         </p:txBody>
       </p:sp>
@@ -4389,6 +4416,7 @@
           <a:lstStyle/>
           <a:p>
             <a:pPr algn="ctr"/>
+            <a:endParaRPr/>
           </a:p>
         </p:txBody>
       </p:sp>
@@ -4432,6 +4460,7 @@
           <a:lstStyle/>
           <a:p>
             <a:pPr algn="ctr"/>
+            <a:endParaRPr/>
           </a:p>
         </p:txBody>
       </p:sp>
@@ -4475,6 +4504,7 @@
           <a:lstStyle/>
           <a:p>
             <a:pPr algn="ctr"/>
+            <a:endParaRPr/>
           </a:p>
         </p:txBody>
       </p:sp>
@@ -4518,6 +4548,7 @@
           <a:lstStyle/>
           <a:p>
             <a:pPr algn="ctr"/>
+            <a:endParaRPr/>
           </a:p>
         </p:txBody>
       </p:sp>
@@ -4561,6 +4592,7 @@
           <a:lstStyle/>
           <a:p>
             <a:pPr algn="ctr"/>
+            <a:endParaRPr/>
           </a:p>
         </p:txBody>
       </p:sp>
@@ -4604,6 +4636,7 @@
           <a:lstStyle/>
           <a:p>
             <a:pPr algn="ctr"/>
+            <a:endParaRPr/>
           </a:p>
         </p:txBody>
       </p:sp>
@@ -4647,6 +4680,7 @@
           <a:lstStyle/>
           <a:p>
             <a:pPr algn="ctr"/>
+            <a:endParaRPr/>
           </a:p>
         </p:txBody>
       </p:sp>
@@ -4690,6 +4724,7 @@
           <a:lstStyle/>
           <a:p>
             <a:pPr algn="ctr"/>
+            <a:endParaRPr/>
           </a:p>
         </p:txBody>
       </p:sp>
@@ -4733,6 +4768,7 @@
           <a:lstStyle/>
           <a:p>
             <a:pPr algn="ctr"/>
+            <a:endParaRPr/>
           </a:p>
         </p:txBody>
       </p:sp>
@@ -4776,6 +4812,7 @@
           <a:lstStyle/>
           <a:p>
             <a:pPr algn="ctr"/>
+            <a:endParaRPr/>
           </a:p>
         </p:txBody>
       </p:sp>
@@ -4819,6 +4856,7 @@
           <a:lstStyle/>
           <a:p>
             <a:pPr algn="ctr"/>
+            <a:endParaRPr/>
           </a:p>
         </p:txBody>
       </p:sp>
@@ -4862,6 +4900,7 @@
           <a:lstStyle/>
           <a:p>
             <a:pPr algn="ctr"/>
+            <a:endParaRPr/>
           </a:p>
         </p:txBody>
       </p:sp>
@@ -4905,6 +4944,7 @@
           <a:lstStyle/>
           <a:p>
             <a:pPr algn="ctr"/>
+            <a:endParaRPr/>
           </a:p>
         </p:txBody>
       </p:sp>
@@ -4948,6 +4988,7 @@
           <a:lstStyle/>
           <a:p>
             <a:pPr algn="ctr"/>
+            <a:endParaRPr/>
           </a:p>
         </p:txBody>
       </p:sp>
@@ -4991,6 +5032,7 @@
           <a:lstStyle/>
           <a:p>
             <a:pPr algn="ctr"/>
+            <a:endParaRPr/>
           </a:p>
         </p:txBody>
       </p:sp>
@@ -5034,6 +5076,7 @@
           <a:lstStyle/>
           <a:p>
             <a:pPr algn="ctr"/>
+            <a:endParaRPr/>
           </a:p>
         </p:txBody>
       </p:sp>
@@ -5077,6 +5120,7 @@
           <a:lstStyle/>
           <a:p>
             <a:pPr algn="ctr"/>
+            <a:endParaRPr/>
           </a:p>
         </p:txBody>
       </p:sp>
@@ -5120,6 +5164,7 @@
           <a:lstStyle/>
           <a:p>
             <a:pPr algn="ctr"/>
+            <a:endParaRPr/>
           </a:p>
         </p:txBody>
       </p:sp>
@@ -5163,6 +5208,7 @@
           <a:lstStyle/>
           <a:p>
             <a:pPr algn="ctr"/>
+            <a:endParaRPr/>
           </a:p>
         </p:txBody>
       </p:sp>
@@ -5206,6 +5252,7 @@
           <a:lstStyle/>
           <a:p>
             <a:pPr algn="ctr"/>
+            <a:endParaRPr/>
           </a:p>
         </p:txBody>
       </p:sp>
@@ -5249,6 +5296,7 @@
           <a:lstStyle/>
           <a:p>
             <a:pPr algn="ctr"/>
+            <a:endParaRPr/>
           </a:p>
         </p:txBody>
       </p:sp>
@@ -5292,6 +5340,7 @@
           <a:lstStyle/>
           <a:p>
             <a:pPr algn="ctr"/>
+            <a:endParaRPr/>
           </a:p>
         </p:txBody>
       </p:sp>
@@ -5335,6 +5384,7 @@
           <a:lstStyle/>
           <a:p>
             <a:pPr algn="ctr"/>
+            <a:endParaRPr/>
           </a:p>
         </p:txBody>
       </p:sp>
@@ -5378,6 +5428,7 @@
           <a:lstStyle/>
           <a:p>
             <a:pPr algn="ctr"/>
+            <a:endParaRPr/>
           </a:p>
         </p:txBody>
       </p:sp>
@@ -5421,6 +5472,7 @@
           <a:lstStyle/>
           <a:p>
             <a:pPr algn="ctr"/>
+            <a:endParaRPr/>
           </a:p>
         </p:txBody>
       </p:sp>
@@ -5464,9 +5516,40 @@
           <a:lstStyle/>
           <a:p>
             <a:pPr algn="ctr"/>
-          </a:p>
-        </p:txBody>
-      </p:sp>
+            <a:endParaRPr/>
+          </a:p>
+        </p:txBody>
+      </p:sp>
+      <p:pic>
+        <p:nvPicPr>
+          <p:cNvPr id="58" name="Picture 57" descr="High-quality fictitious fitness tracker product render in a modern minimalist tech-deck style: a sleek black wristband with a rectangular rounded display, subtle cyan (#00B7E5) glow UI elements on the screen (simple icons, no readable text), matte materials, clean edges. Composition: three-quarter angle, centered, slight perspective, with soft diffused studio lighting from upper left creating gentle highlights and smooth shadows. Background environment: dark navy gradient backdrop matching #071A29–#0B1F2F with a faint geometric grid/tile pattern in darker blue (#17364B) to harmonize with the slide’s right-side motif; keep background low-contrast and uncluttered. Rendering style: crisp semi-flat 3D (not photorealistic), restrained corporate look, no heavy shadows, no reflections. ABSOLUTELY no text.">
+            <a:extLst>
+              <a:ext uri="{FF2B5EF4-FFF2-40B4-BE49-F238E27FC236}">
+                <a16:creationId xmlns:a16="http://schemas.microsoft.com/office/drawing/2014/main" id="{FAAB5A63-2853-447A-B06B-941E7AE63E0F}"/>
+              </a:ext>
+            </a:extLst>
+          </p:cNvPr>
+          <p:cNvPicPr>
+            <a:picLocks noChangeAspect="1"/>
+          </p:cNvPicPr>
+          <p:nvPr/>
+        </p:nvPicPr>
+        <p:blipFill>
+          <a:blip r:embed="rId2"/>
+          <a:stretch>
+            <a:fillRect/>
+          </a:stretch>
+        </p:blipFill>
+        <p:spPr>
+          <a:xfrm>
+            <a:off x="6604000" y="1905000"/>
+            <a:ext cx="4572000" cy="3048000"/>
+          </a:xfrm>
+          <a:prstGeom prst="rect">
+            <a:avLst/>
+          </a:prstGeom>
+        </p:spPr>
+      </p:pic>
     </p:spTree>
   </p:cSld>
   <p:clrMapOvr>
@@ -5476,7 +5559,7 @@
 </file>
 
 <file path=ppt/slides/slide10.xml><?xml version="1.0" encoding="utf-8"?>
-<p:sld xmlns:a="http://schemas.openxmlformats.org/drawingml/2006/main" xmlns:p="http://schemas.openxmlformats.org/presentationml/2006/main" xmlns:r="http://schemas.openxmlformats.org/officeDocument/2006/relationships">
+<p:sld xmlns:a="http://schemas.openxmlformats.org/drawingml/2006/main" xmlns:r="http://schemas.openxmlformats.org/officeDocument/2006/relationships" xmlns:p="http://schemas.openxmlformats.org/presentationml/2006/main">
   <p:cSld>
     <p:spTree>
       <p:nvGrpSpPr>
@@ -5484,7 +5567,14 @@
         <p:cNvGrpSpPr/>
         <p:nvPr/>
       </p:nvGrpSpPr>
-      <p:grpSpPr/>
+      <p:grpSpPr>
+        <a:xfrm>
+          <a:off x="0" y="0"/>
+          <a:ext cx="0" cy="0"/>
+          <a:chOff x="0" y="0"/>
+          <a:chExt cx="0" cy="0"/>
+        </a:xfrm>
+      </p:grpSpPr>
       <p:sp>
         <p:nvSpPr>
           <p:cNvPr id="2" name="Rectangle 1"/>
@@ -5525,6 +5615,7 @@
           <a:lstStyle/>
           <a:p>
             <a:pPr algn="ctr"/>
+            <a:endParaRPr/>
           </a:p>
         </p:txBody>
       </p:sp>
@@ -5603,6 +5694,7 @@
           <a:lstStyle/>
           <a:p>
             <a:pPr algn="ctr"/>
+            <a:endParaRPr/>
           </a:p>
         </p:txBody>
       </p:sp>
@@ -5681,6 +5773,7 @@
           <a:lstStyle/>
           <a:p>
             <a:pPr algn="ctr"/>
+            <a:endParaRPr/>
           </a:p>
         </p:txBody>
       </p:sp>
@@ -5724,6 +5817,7 @@
           <a:lstStyle/>
           <a:p>
             <a:pPr algn="ctr"/>
+            <a:endParaRPr/>
           </a:p>
         </p:txBody>
       </p:sp>
@@ -5942,6 +6036,7 @@
           <a:lstStyle/>
           <a:p>
             <a:pPr algn="ctr"/>
+            <a:endParaRPr/>
           </a:p>
         </p:txBody>
       </p:sp>
@@ -5985,6 +6080,7 @@
           <a:lstStyle/>
           <a:p>
             <a:pPr algn="ctr"/>
+            <a:endParaRPr/>
           </a:p>
         </p:txBody>
       </p:sp>
@@ -6203,6 +6299,7 @@
           <a:lstStyle/>
           <a:p>
             <a:pPr algn="ctr"/>
+            <a:endParaRPr/>
           </a:p>
         </p:txBody>
       </p:sp>
@@ -6246,6 +6343,7 @@
           <a:lstStyle/>
           <a:p>
             <a:pPr algn="ctr"/>
+            <a:endParaRPr/>
           </a:p>
         </p:txBody>
       </p:sp>
@@ -6464,6 +6562,7 @@
           <a:lstStyle/>
           <a:p>
             <a:pPr algn="ctr"/>
+            <a:endParaRPr/>
           </a:p>
         </p:txBody>
       </p:sp>
@@ -6507,6 +6606,7 @@
           <a:lstStyle/>
           <a:p>
             <a:pPr algn="ctr"/>
+            <a:endParaRPr/>
           </a:p>
         </p:txBody>
       </p:sp>
@@ -6725,6 +6825,7 @@
           <a:lstStyle/>
           <a:p>
             <a:pPr algn="ctr"/>
+            <a:endParaRPr/>
           </a:p>
         </p:txBody>
       </p:sp>
@@ -6807,7 +6908,7 @@
 </file>
 
 <file path=ppt/slides/slide11.xml><?xml version="1.0" encoding="utf-8"?>
-<p:sld xmlns:a="http://schemas.openxmlformats.org/drawingml/2006/main" xmlns:p="http://schemas.openxmlformats.org/presentationml/2006/main" xmlns:r="http://schemas.openxmlformats.org/officeDocument/2006/relationships">
+<p:sld xmlns:a="http://schemas.openxmlformats.org/drawingml/2006/main" xmlns:r="http://schemas.openxmlformats.org/officeDocument/2006/relationships" xmlns:p="http://schemas.openxmlformats.org/presentationml/2006/main">
   <p:cSld>
     <p:spTree>
       <p:nvGrpSpPr>
@@ -6815,7 +6916,14 @@
         <p:cNvGrpSpPr/>
         <p:nvPr/>
       </p:nvGrpSpPr>
-      <p:grpSpPr/>
+      <p:grpSpPr>
+        <a:xfrm>
+          <a:off x="0" y="0"/>
+          <a:ext cx="0" cy="0"/>
+          <a:chOff x="0" y="0"/>
+          <a:chExt cx="0" cy="0"/>
+        </a:xfrm>
+      </p:grpSpPr>
       <p:sp>
         <p:nvSpPr>
           <p:cNvPr id="2" name="Rectangle 1"/>
@@ -6856,6 +6964,7 @@
           <a:lstStyle/>
           <a:p>
             <a:pPr algn="ctr"/>
+            <a:endParaRPr/>
           </a:p>
         </p:txBody>
       </p:sp>
@@ -6934,6 +7043,7 @@
           <a:lstStyle/>
           <a:p>
             <a:pPr algn="ctr"/>
+            <a:endParaRPr/>
           </a:p>
         </p:txBody>
       </p:sp>
@@ -7012,6 +7122,7 @@
           <a:lstStyle/>
           <a:p>
             <a:pPr algn="ctr"/>
+            <a:endParaRPr/>
           </a:p>
         </p:txBody>
       </p:sp>
@@ -7055,6 +7166,7 @@
           <a:lstStyle/>
           <a:p>
             <a:pPr algn="ctr"/>
+            <a:endParaRPr/>
           </a:p>
         </p:txBody>
       </p:sp>
@@ -7168,6 +7280,7 @@
           <a:lstStyle/>
           <a:p>
             <a:pPr algn="ctr"/>
+            <a:endParaRPr/>
           </a:p>
         </p:txBody>
       </p:sp>
@@ -7281,6 +7394,7 @@
           <a:lstStyle/>
           <a:p>
             <a:pPr algn="ctr"/>
+            <a:endParaRPr/>
           </a:p>
         </p:txBody>
       </p:sp>
@@ -7324,6 +7438,7 @@
           <a:lstStyle/>
           <a:p>
             <a:pPr algn="ctr"/>
+            <a:endParaRPr/>
           </a:p>
         </p:txBody>
       </p:sp>
@@ -7437,6 +7552,7 @@
           <a:lstStyle/>
           <a:p>
             <a:pPr algn="ctr"/>
+            <a:endParaRPr/>
           </a:p>
         </p:txBody>
       </p:sp>
@@ -7550,6 +7666,7 @@
           <a:lstStyle/>
           <a:p>
             <a:pPr algn="ctr"/>
+            <a:endParaRPr/>
           </a:p>
         </p:txBody>
       </p:sp>
@@ -7593,6 +7710,7 @@
           <a:lstStyle/>
           <a:p>
             <a:pPr algn="ctr"/>
+            <a:endParaRPr/>
           </a:p>
         </p:txBody>
       </p:sp>
@@ -7706,6 +7824,7 @@
           <a:lstStyle/>
           <a:p>
             <a:pPr algn="ctr"/>
+            <a:endParaRPr/>
           </a:p>
         </p:txBody>
       </p:sp>
@@ -7819,6 +7938,7 @@
           <a:lstStyle/>
           <a:p>
             <a:pPr algn="ctr"/>
+            <a:endParaRPr/>
           </a:p>
         </p:txBody>
       </p:sp>
@@ -7862,6 +7982,7 @@
           <a:lstStyle/>
           <a:p>
             <a:pPr algn="ctr"/>
+            <a:endParaRPr/>
           </a:p>
         </p:txBody>
       </p:sp>
@@ -7975,6 +8096,7 @@
           <a:lstStyle/>
           <a:p>
             <a:pPr algn="ctr"/>
+            <a:endParaRPr/>
           </a:p>
         </p:txBody>
       </p:sp>
@@ -8092,7 +8214,7 @@
 </file>
 
 <file path=ppt/slides/slide12.xml><?xml version="1.0" encoding="utf-8"?>
-<p:sld xmlns:a="http://schemas.openxmlformats.org/drawingml/2006/main" xmlns:p="http://schemas.openxmlformats.org/presentationml/2006/main" xmlns:r="http://schemas.openxmlformats.org/officeDocument/2006/relationships">
+<p:sld xmlns:a="http://schemas.openxmlformats.org/drawingml/2006/main" xmlns:r="http://schemas.openxmlformats.org/officeDocument/2006/relationships" xmlns:p="http://schemas.openxmlformats.org/presentationml/2006/main">
   <p:cSld>
     <p:spTree>
       <p:nvGrpSpPr>
@@ -8100,7 +8222,14 @@
         <p:cNvGrpSpPr/>
         <p:nvPr/>
       </p:nvGrpSpPr>
-      <p:grpSpPr/>
+      <p:grpSpPr>
+        <a:xfrm>
+          <a:off x="0" y="0"/>
+          <a:ext cx="0" cy="0"/>
+          <a:chOff x="0" y="0"/>
+          <a:chExt cx="0" cy="0"/>
+        </a:xfrm>
+      </p:grpSpPr>
       <p:sp>
         <p:nvSpPr>
           <p:cNvPr id="2" name="Rectangle 1"/>
@@ -8141,6 +8270,7 @@
           <a:lstStyle/>
           <a:p>
             <a:pPr algn="ctr"/>
+            <a:endParaRPr/>
           </a:p>
         </p:txBody>
       </p:sp>
@@ -8184,6 +8314,7 @@
           <a:lstStyle/>
           <a:p>
             <a:pPr algn="ctr"/>
+            <a:endParaRPr/>
           </a:p>
         </p:txBody>
       </p:sp>
@@ -8227,6 +8358,7 @@
           <a:lstStyle/>
           <a:p>
             <a:pPr algn="ctr"/>
+            <a:endParaRPr/>
           </a:p>
         </p:txBody>
       </p:sp>
@@ -8340,6 +8472,7 @@
           <a:lstStyle/>
           <a:p>
             <a:pPr algn="ctr"/>
+            <a:endParaRPr/>
           </a:p>
         </p:txBody>
       </p:sp>
@@ -8418,6 +8551,7 @@
           <a:lstStyle/>
           <a:p>
             <a:pPr algn="ctr"/>
+            <a:endParaRPr/>
           </a:p>
         </p:txBody>
       </p:sp>
@@ -8496,6 +8630,7 @@
           <a:lstStyle/>
           <a:p>
             <a:pPr algn="ctr"/>
+            <a:endParaRPr/>
           </a:p>
         </p:txBody>
       </p:sp>
@@ -8574,6 +8709,7 @@
           <a:lstStyle/>
           <a:p>
             <a:pPr algn="ctr"/>
+            <a:endParaRPr/>
           </a:p>
         </p:txBody>
       </p:sp>
@@ -8652,6 +8788,7 @@
           <a:lstStyle/>
           <a:p>
             <a:pPr algn="ctr"/>
+            <a:endParaRPr/>
           </a:p>
         </p:txBody>
       </p:sp>
@@ -8730,6 +8867,7 @@
           <a:lstStyle/>
           <a:p>
             <a:pPr algn="ctr"/>
+            <a:endParaRPr/>
           </a:p>
         </p:txBody>
       </p:sp>
@@ -8847,7 +8985,7 @@
 </file>
 
 <file path=ppt/slides/slide2.xml><?xml version="1.0" encoding="utf-8"?>
-<p:sld xmlns:a="http://schemas.openxmlformats.org/drawingml/2006/main" xmlns:p="http://schemas.openxmlformats.org/presentationml/2006/main" xmlns:r="http://schemas.openxmlformats.org/officeDocument/2006/relationships">
+<p:sld xmlns:a="http://schemas.openxmlformats.org/drawingml/2006/main" xmlns:r="http://schemas.openxmlformats.org/officeDocument/2006/relationships" xmlns:p="http://schemas.openxmlformats.org/presentationml/2006/main">
   <p:cSld>
     <p:spTree>
       <p:nvGrpSpPr>
@@ -8855,7 +8993,14 @@
         <p:cNvGrpSpPr/>
         <p:nvPr/>
       </p:nvGrpSpPr>
-      <p:grpSpPr/>
+      <p:grpSpPr>
+        <a:xfrm>
+          <a:off x="0" y="0"/>
+          <a:ext cx="0" cy="0"/>
+          <a:chOff x="0" y="0"/>
+          <a:chExt cx="0" cy="0"/>
+        </a:xfrm>
+      </p:grpSpPr>
       <p:sp>
         <p:nvSpPr>
           <p:cNvPr id="2" name="Rectangle 1"/>
@@ -8896,6 +9041,7 @@
           <a:lstStyle/>
           <a:p>
             <a:pPr algn="ctr"/>
+            <a:endParaRPr/>
           </a:p>
         </p:txBody>
       </p:sp>
@@ -8974,6 +9120,7 @@
           <a:lstStyle/>
           <a:p>
             <a:pPr algn="ctr"/>
+            <a:endParaRPr/>
           </a:p>
         </p:txBody>
       </p:sp>
@@ -9052,6 +9199,7 @@
           <a:lstStyle/>
           <a:p>
             <a:pPr algn="ctr"/>
+            <a:endParaRPr/>
           </a:p>
         </p:txBody>
       </p:sp>
@@ -9410,6 +9558,7 @@
           <a:lstStyle/>
           <a:p>
             <a:pPr algn="ctr"/>
+            <a:endParaRPr/>
           </a:p>
         </p:txBody>
       </p:sp>
@@ -9768,6 +9917,7 @@
           <a:lstStyle/>
           <a:p>
             <a:pPr algn="ctr"/>
+            <a:endParaRPr/>
           </a:p>
         </p:txBody>
       </p:sp>
@@ -9881,6 +10031,7 @@
           <a:lstStyle/>
           <a:p>
             <a:pPr algn="ctr"/>
+            <a:endParaRPr/>
           </a:p>
         </p:txBody>
       </p:sp>
@@ -9959,6 +10110,7 @@
           <a:lstStyle/>
           <a:p>
             <a:pPr algn="ctr"/>
+            <a:endParaRPr/>
           </a:p>
         </p:txBody>
       </p:sp>
@@ -10037,6 +10189,7 @@
           <a:lstStyle/>
           <a:p>
             <a:pPr algn="ctr"/>
+            <a:endParaRPr/>
           </a:p>
         </p:txBody>
       </p:sp>
@@ -10115,6 +10268,7 @@
           <a:lstStyle/>
           <a:p>
             <a:pPr algn="ctr"/>
+            <a:endParaRPr/>
           </a:p>
         </p:txBody>
       </p:sp>
@@ -10197,7 +10351,7 @@
 </file>
 
 <file path=ppt/slides/slide3.xml><?xml version="1.0" encoding="utf-8"?>
-<p:sld xmlns:a="http://schemas.openxmlformats.org/drawingml/2006/main" xmlns:p="http://schemas.openxmlformats.org/presentationml/2006/main" xmlns:r="http://schemas.openxmlformats.org/officeDocument/2006/relationships">
+<p:sld xmlns:a="http://schemas.openxmlformats.org/drawingml/2006/main" xmlns:r="http://schemas.openxmlformats.org/officeDocument/2006/relationships" xmlns:p="http://schemas.openxmlformats.org/presentationml/2006/main">
   <p:cSld>
     <p:spTree>
       <p:nvGrpSpPr>
@@ -10205,7 +10359,14 @@
         <p:cNvGrpSpPr/>
         <p:nvPr/>
       </p:nvGrpSpPr>
-      <p:grpSpPr/>
+      <p:grpSpPr>
+        <a:xfrm>
+          <a:off x="0" y="0"/>
+          <a:ext cx="0" cy="0"/>
+          <a:chOff x="0" y="0"/>
+          <a:chExt cx="0" cy="0"/>
+        </a:xfrm>
+      </p:grpSpPr>
       <p:sp>
         <p:nvSpPr>
           <p:cNvPr id="2" name="Rectangle 1"/>
@@ -10246,6 +10407,7 @@
           <a:lstStyle/>
           <a:p>
             <a:pPr algn="ctr"/>
+            <a:endParaRPr/>
           </a:p>
         </p:txBody>
       </p:sp>
@@ -10324,6 +10486,7 @@
           <a:lstStyle/>
           <a:p>
             <a:pPr algn="ctr"/>
+            <a:endParaRPr/>
           </a:p>
         </p:txBody>
       </p:sp>
@@ -10402,6 +10565,7 @@
           <a:lstStyle/>
           <a:p>
             <a:pPr algn="ctr"/>
+            <a:endParaRPr/>
           </a:p>
         </p:txBody>
       </p:sp>
@@ -10445,6 +10609,7 @@
           <a:lstStyle/>
           <a:p>
             <a:pPr algn="ctr"/>
+            <a:endParaRPr/>
           </a:p>
         </p:txBody>
       </p:sp>
@@ -10943,6 +11108,7 @@
           <a:lstStyle/>
           <a:p>
             <a:pPr algn="ctr"/>
+            <a:endParaRPr/>
           </a:p>
         </p:txBody>
       </p:sp>
@@ -10986,6 +11152,7 @@
           <a:lstStyle/>
           <a:p>
             <a:pPr algn="ctr"/>
+            <a:endParaRPr/>
           </a:p>
         </p:txBody>
       </p:sp>
@@ -11344,6 +11511,7 @@
           <a:lstStyle/>
           <a:p>
             <a:pPr algn="ctr"/>
+            <a:endParaRPr/>
           </a:p>
         </p:txBody>
       </p:sp>
@@ -11426,7 +11594,7 @@
 </file>
 
 <file path=ppt/slides/slide4.xml><?xml version="1.0" encoding="utf-8"?>
-<p:sld xmlns:a="http://schemas.openxmlformats.org/drawingml/2006/main" xmlns:p="http://schemas.openxmlformats.org/presentationml/2006/main" xmlns:r="http://schemas.openxmlformats.org/officeDocument/2006/relationships">
+<p:sld xmlns:a="http://schemas.openxmlformats.org/drawingml/2006/main" xmlns:r="http://schemas.openxmlformats.org/officeDocument/2006/relationships" xmlns:p="http://schemas.openxmlformats.org/presentationml/2006/main">
   <p:cSld>
     <p:spTree>
       <p:nvGrpSpPr>
@@ -11434,7 +11602,14 @@
         <p:cNvGrpSpPr/>
         <p:nvPr/>
       </p:nvGrpSpPr>
-      <p:grpSpPr/>
+      <p:grpSpPr>
+        <a:xfrm>
+          <a:off x="0" y="0"/>
+          <a:ext cx="0" cy="0"/>
+          <a:chOff x="0" y="0"/>
+          <a:chExt cx="0" cy="0"/>
+        </a:xfrm>
+      </p:grpSpPr>
       <p:sp>
         <p:nvSpPr>
           <p:cNvPr id="2" name="Rectangle 1"/>
@@ -11475,6 +11650,7 @@
           <a:lstStyle/>
           <a:p>
             <a:pPr algn="ctr"/>
+            <a:endParaRPr/>
           </a:p>
         </p:txBody>
       </p:sp>
@@ -11553,6 +11729,7 @@
           <a:lstStyle/>
           <a:p>
             <a:pPr algn="ctr"/>
+            <a:endParaRPr/>
           </a:p>
         </p:txBody>
       </p:sp>
@@ -11631,6 +11808,7 @@
           <a:lstStyle/>
           <a:p>
             <a:pPr algn="ctr"/>
+            <a:endParaRPr/>
           </a:p>
         </p:txBody>
       </p:sp>
@@ -11674,6 +11852,7 @@
           <a:lstStyle/>
           <a:p>
             <a:pPr algn="ctr"/>
+            <a:endParaRPr/>
           </a:p>
         </p:txBody>
       </p:sp>
@@ -11860,6 +12039,7 @@
           <a:lstStyle/>
           <a:p>
             <a:pPr algn="ctr"/>
+            <a:endParaRPr/>
           </a:p>
         </p:txBody>
       </p:sp>
@@ -11903,6 +12083,7 @@
           <a:lstStyle/>
           <a:p>
             <a:pPr algn="ctr"/>
+            <a:endParaRPr/>
           </a:p>
         </p:txBody>
       </p:sp>
@@ -12088,6 +12269,7 @@
           <a:lstStyle/>
           <a:p>
             <a:pPr algn="ctr"/>
+            <a:endParaRPr/>
           </a:p>
         </p:txBody>
       </p:sp>
@@ -12131,6 +12313,7 @@
           <a:lstStyle/>
           <a:p>
             <a:pPr algn="ctr"/>
+            <a:endParaRPr/>
           </a:p>
         </p:txBody>
       </p:sp>
@@ -12317,6 +12500,7 @@
           <a:lstStyle/>
           <a:p>
             <a:pPr algn="ctr"/>
+            <a:endParaRPr/>
           </a:p>
         </p:txBody>
       </p:sp>
@@ -12360,6 +12544,7 @@
           <a:lstStyle/>
           <a:p>
             <a:pPr algn="ctr"/>
+            <a:endParaRPr/>
           </a:p>
         </p:txBody>
       </p:sp>
@@ -12546,6 +12731,7 @@
           <a:lstStyle/>
           <a:p>
             <a:pPr algn="ctr"/>
+            <a:endParaRPr/>
           </a:p>
         </p:txBody>
       </p:sp>
@@ -12589,6 +12775,7 @@
           <a:lstStyle/>
           <a:p>
             <a:pPr algn="ctr"/>
+            <a:endParaRPr/>
           </a:p>
         </p:txBody>
       </p:sp>
@@ -12740,6 +12927,7 @@
           <a:lstStyle/>
           <a:p>
             <a:pPr algn="ctr"/>
+            <a:endParaRPr/>
           </a:p>
         </p:txBody>
       </p:sp>
@@ -12822,7 +13010,7 @@
 </file>
 
 <file path=ppt/slides/slide5.xml><?xml version="1.0" encoding="utf-8"?>
-<p:sld xmlns:a="http://schemas.openxmlformats.org/drawingml/2006/main" xmlns:p="http://schemas.openxmlformats.org/presentationml/2006/main" xmlns:r="http://schemas.openxmlformats.org/officeDocument/2006/relationships">
+<p:sld xmlns:a="http://schemas.openxmlformats.org/drawingml/2006/main" xmlns:r="http://schemas.openxmlformats.org/officeDocument/2006/relationships" xmlns:p="http://schemas.openxmlformats.org/presentationml/2006/main">
   <p:cSld>
     <p:spTree>
       <p:nvGrpSpPr>
@@ -12830,7 +13018,14 @@
         <p:cNvGrpSpPr/>
         <p:nvPr/>
       </p:nvGrpSpPr>
-      <p:grpSpPr/>
+      <p:grpSpPr>
+        <a:xfrm>
+          <a:off x="0" y="0"/>
+          <a:ext cx="0" cy="0"/>
+          <a:chOff x="0" y="0"/>
+          <a:chExt cx="0" cy="0"/>
+        </a:xfrm>
+      </p:grpSpPr>
       <p:sp>
         <p:nvSpPr>
           <p:cNvPr id="2" name="Rectangle 1"/>
@@ -12871,6 +13066,7 @@
           <a:lstStyle/>
           <a:p>
             <a:pPr algn="ctr"/>
+            <a:endParaRPr/>
           </a:p>
         </p:txBody>
       </p:sp>
@@ -12949,6 +13145,7 @@
           <a:lstStyle/>
           <a:p>
             <a:pPr algn="ctr"/>
+            <a:endParaRPr/>
           </a:p>
         </p:txBody>
       </p:sp>
@@ -13307,6 +13504,7 @@
           <a:lstStyle/>
           <a:p>
             <a:pPr algn="ctr"/>
+            <a:endParaRPr/>
           </a:p>
         </p:txBody>
       </p:sp>
@@ -13350,6 +13548,7 @@
           <a:lstStyle/>
           <a:p>
             <a:pPr algn="ctr"/>
+            <a:endParaRPr/>
           </a:p>
         </p:txBody>
       </p:sp>
@@ -13505,7 +13704,7 @@
 </file>
 
 <file path=ppt/slides/slide6.xml><?xml version="1.0" encoding="utf-8"?>
-<p:sld xmlns:a="http://schemas.openxmlformats.org/drawingml/2006/main" xmlns:p="http://schemas.openxmlformats.org/presentationml/2006/main" xmlns:r="http://schemas.openxmlformats.org/officeDocument/2006/relationships">
+<p:sld xmlns:a="http://schemas.openxmlformats.org/drawingml/2006/main" xmlns:r="http://schemas.openxmlformats.org/officeDocument/2006/relationships" xmlns:p="http://schemas.openxmlformats.org/presentationml/2006/main">
   <p:cSld>
     <p:spTree>
       <p:nvGrpSpPr>
@@ -13513,7 +13712,14 @@
         <p:cNvGrpSpPr/>
         <p:nvPr/>
       </p:nvGrpSpPr>
-      <p:grpSpPr/>
+      <p:grpSpPr>
+        <a:xfrm>
+          <a:off x="0" y="0"/>
+          <a:ext cx="0" cy="0"/>
+          <a:chOff x="0" y="0"/>
+          <a:chExt cx="0" cy="0"/>
+        </a:xfrm>
+      </p:grpSpPr>
       <p:sp>
         <p:nvSpPr>
           <p:cNvPr id="2" name="Rectangle 1"/>
@@ -13554,6 +13760,7 @@
           <a:lstStyle/>
           <a:p>
             <a:pPr algn="ctr"/>
+            <a:endParaRPr/>
           </a:p>
         </p:txBody>
       </p:sp>
@@ -13632,6 +13839,7 @@
           <a:lstStyle/>
           <a:p>
             <a:pPr algn="ctr"/>
+            <a:endParaRPr/>
           </a:p>
         </p:txBody>
       </p:sp>
@@ -13710,6 +13918,7 @@
           <a:lstStyle/>
           <a:p>
             <a:pPr algn="ctr"/>
+            <a:endParaRPr/>
           </a:p>
         </p:txBody>
       </p:sp>
@@ -13788,6 +13997,7 @@
           <a:lstStyle/>
           <a:p>
             <a:pPr algn="ctr"/>
+            <a:endParaRPr/>
           </a:p>
         </p:txBody>
       </p:sp>
@@ -13831,6 +14041,7 @@
           <a:lstStyle/>
           <a:p>
             <a:pPr algn="ctr"/>
+            <a:endParaRPr/>
           </a:p>
         </p:txBody>
       </p:sp>
@@ -13947,6 +14158,7 @@
           <a:lstStyle/>
           <a:p>
             <a:pPr algn="ctr"/>
+            <a:endParaRPr/>
           </a:p>
         </p:txBody>
       </p:sp>
@@ -13990,6 +14202,7 @@
           <a:lstStyle/>
           <a:p>
             <a:pPr algn="ctr"/>
+            <a:endParaRPr/>
           </a:p>
         </p:txBody>
       </p:sp>
@@ -14106,6 +14319,7 @@
           <a:lstStyle/>
           <a:p>
             <a:pPr algn="ctr"/>
+            <a:endParaRPr/>
           </a:p>
         </p:txBody>
       </p:sp>
@@ -14184,6 +14398,7 @@
           <a:lstStyle/>
           <a:p>
             <a:pPr algn="ctr"/>
+            <a:endParaRPr/>
           </a:p>
         </p:txBody>
       </p:sp>
@@ -14262,6 +14477,7 @@
           <a:lstStyle/>
           <a:p>
             <a:pPr algn="ctr"/>
+            <a:endParaRPr/>
           </a:p>
         </p:txBody>
       </p:sp>
@@ -14340,6 +14556,7 @@
           <a:lstStyle/>
           <a:p>
             <a:pPr algn="ctr"/>
+            <a:endParaRPr/>
           </a:p>
         </p:txBody>
       </p:sp>
@@ -14418,6 +14635,7 @@
           <a:lstStyle/>
           <a:p>
             <a:pPr algn="ctr"/>
+            <a:endParaRPr/>
           </a:p>
         </p:txBody>
       </p:sp>
@@ -14496,6 +14714,7 @@
           <a:lstStyle/>
           <a:p>
             <a:pPr algn="ctr"/>
+            <a:endParaRPr/>
           </a:p>
         </p:txBody>
       </p:sp>
@@ -14578,7 +14797,7 @@
 </file>
 
 <file path=ppt/slides/slide7.xml><?xml version="1.0" encoding="utf-8"?>
-<p:sld xmlns:a="http://schemas.openxmlformats.org/drawingml/2006/main" xmlns:p="http://schemas.openxmlformats.org/presentationml/2006/main" xmlns:r="http://schemas.openxmlformats.org/officeDocument/2006/relationships">
+<p:sld xmlns:a="http://schemas.openxmlformats.org/drawingml/2006/main" xmlns:r="http://schemas.openxmlformats.org/officeDocument/2006/relationships" xmlns:p="http://schemas.openxmlformats.org/presentationml/2006/main">
   <p:cSld>
     <p:spTree>
       <p:nvGrpSpPr>
@@ -14586,7 +14805,14 @@
         <p:cNvGrpSpPr/>
         <p:nvPr/>
       </p:nvGrpSpPr>
-      <p:grpSpPr/>
+      <p:grpSpPr>
+        <a:xfrm>
+          <a:off x="0" y="0"/>
+          <a:ext cx="0" cy="0"/>
+          <a:chOff x="0" y="0"/>
+          <a:chExt cx="0" cy="0"/>
+        </a:xfrm>
+      </p:grpSpPr>
       <p:sp>
         <p:nvSpPr>
           <p:cNvPr id="2" name="Rectangle 1"/>
@@ -14627,6 +14853,7 @@
           <a:lstStyle/>
           <a:p>
             <a:pPr algn="ctr"/>
+            <a:endParaRPr/>
           </a:p>
         </p:txBody>
       </p:sp>
@@ -14705,6 +14932,7 @@
           <a:lstStyle/>
           <a:p>
             <a:pPr algn="ctr"/>
+            <a:endParaRPr/>
           </a:p>
         </p:txBody>
       </p:sp>
@@ -14783,6 +15011,7 @@
           <a:lstStyle/>
           <a:p>
             <a:pPr algn="ctr"/>
+            <a:endParaRPr/>
           </a:p>
         </p:txBody>
       </p:sp>
@@ -14826,6 +15055,7 @@
           <a:lstStyle/>
           <a:p>
             <a:pPr algn="ctr"/>
+            <a:endParaRPr/>
           </a:p>
         </p:txBody>
       </p:sp>
@@ -15081,6 +15311,7 @@
           <a:lstStyle/>
           <a:p>
             <a:pPr algn="ctr"/>
+            <a:endParaRPr/>
           </a:p>
         </p:txBody>
       </p:sp>
@@ -15124,6 +15355,7 @@
           <a:lstStyle/>
           <a:p>
             <a:pPr algn="ctr"/>
+            <a:endParaRPr/>
           </a:p>
         </p:txBody>
       </p:sp>
@@ -15379,6 +15611,7 @@
           <a:lstStyle/>
           <a:p>
             <a:pPr algn="ctr"/>
+            <a:endParaRPr/>
           </a:p>
         </p:txBody>
       </p:sp>
@@ -15422,6 +15655,7 @@
           <a:lstStyle/>
           <a:p>
             <a:pPr algn="ctr"/>
+            <a:endParaRPr/>
           </a:p>
         </p:txBody>
       </p:sp>
@@ -15677,6 +15911,7 @@
           <a:lstStyle/>
           <a:p>
             <a:pPr algn="ctr"/>
+            <a:endParaRPr/>
           </a:p>
         </p:txBody>
       </p:sp>
@@ -15720,6 +15955,7 @@
           <a:lstStyle/>
           <a:p>
             <a:pPr algn="ctr"/>
+            <a:endParaRPr/>
           </a:p>
         </p:txBody>
       </p:sp>
@@ -15975,6 +16211,7 @@
           <a:lstStyle/>
           <a:p>
             <a:pPr algn="ctr"/>
+            <a:endParaRPr/>
           </a:p>
         </p:txBody>
       </p:sp>
@@ -16057,7 +16294,7 @@
 </file>
 
 <file path=ppt/slides/slide8.xml><?xml version="1.0" encoding="utf-8"?>
-<p:sld xmlns:a="http://schemas.openxmlformats.org/drawingml/2006/main" xmlns:p="http://schemas.openxmlformats.org/presentationml/2006/main" xmlns:r="http://schemas.openxmlformats.org/officeDocument/2006/relationships">
+<p:sld xmlns:a="http://schemas.openxmlformats.org/drawingml/2006/main" xmlns:r="http://schemas.openxmlformats.org/officeDocument/2006/relationships" xmlns:p="http://schemas.openxmlformats.org/presentationml/2006/main">
   <p:cSld>
     <p:spTree>
       <p:nvGrpSpPr>
@@ -16065,7 +16302,14 @@
         <p:cNvGrpSpPr/>
         <p:nvPr/>
       </p:nvGrpSpPr>
-      <p:grpSpPr/>
+      <p:grpSpPr>
+        <a:xfrm>
+          <a:off x="0" y="0"/>
+          <a:ext cx="0" cy="0"/>
+          <a:chOff x="0" y="0"/>
+          <a:chExt cx="0" cy="0"/>
+        </a:xfrm>
+      </p:grpSpPr>
       <p:sp>
         <p:nvSpPr>
           <p:cNvPr id="2" name="Rectangle 1"/>
@@ -16106,6 +16350,7 @@
           <a:lstStyle/>
           <a:p>
             <a:pPr algn="ctr"/>
+            <a:endParaRPr/>
           </a:p>
         </p:txBody>
       </p:sp>
@@ -16184,6 +16429,7 @@
           <a:lstStyle/>
           <a:p>
             <a:pPr algn="ctr"/>
+            <a:endParaRPr/>
           </a:p>
         </p:txBody>
       </p:sp>
@@ -16262,6 +16508,7 @@
           <a:lstStyle/>
           <a:p>
             <a:pPr algn="ctr"/>
+            <a:endParaRPr/>
           </a:p>
         </p:txBody>
       </p:sp>
@@ -16305,6 +16552,7 @@
           <a:lstStyle/>
           <a:p>
             <a:pPr algn="ctr"/>
+            <a:endParaRPr/>
           </a:p>
         </p:txBody>
       </p:sp>
@@ -16558,6 +16806,7 @@
           <a:lstStyle/>
           <a:p>
             <a:pPr algn="ctr"/>
+            <a:endParaRPr/>
           </a:p>
         </p:txBody>
       </p:sp>
@@ -16601,6 +16850,7 @@
           <a:lstStyle/>
           <a:p>
             <a:pPr algn="ctr"/>
+            <a:endParaRPr/>
           </a:p>
         </p:txBody>
       </p:sp>
@@ -16819,6 +17069,7 @@
           <a:lstStyle/>
           <a:p>
             <a:pPr algn="ctr"/>
+            <a:endParaRPr/>
           </a:p>
         </p:txBody>
       </p:sp>
@@ -16862,6 +17113,7 @@
           <a:lstStyle/>
           <a:p>
             <a:pPr algn="ctr"/>
+            <a:endParaRPr/>
           </a:p>
         </p:txBody>
       </p:sp>
@@ -17080,6 +17332,7 @@
           <a:lstStyle/>
           <a:p>
             <a:pPr algn="ctr"/>
+            <a:endParaRPr/>
           </a:p>
         </p:txBody>
       </p:sp>
@@ -17123,6 +17376,7 @@
           <a:lstStyle/>
           <a:p>
             <a:pPr algn="ctr"/>
+            <a:endParaRPr/>
           </a:p>
         </p:txBody>
       </p:sp>
@@ -17376,6 +17630,7 @@
           <a:lstStyle/>
           <a:p>
             <a:pPr algn="ctr"/>
+            <a:endParaRPr/>
           </a:p>
         </p:txBody>
       </p:sp>
@@ -17419,6 +17674,7 @@
           <a:lstStyle/>
           <a:p>
             <a:pPr algn="ctr"/>
+            <a:endParaRPr/>
           </a:p>
         </p:txBody>
       </p:sp>
@@ -17637,6 +17893,7 @@
           <a:lstStyle/>
           <a:p>
             <a:pPr algn="ctr"/>
+            <a:endParaRPr/>
           </a:p>
         </p:txBody>
       </p:sp>
@@ -17680,6 +17937,7 @@
           <a:lstStyle/>
           <a:p>
             <a:pPr algn="ctr"/>
+            <a:endParaRPr/>
           </a:p>
         </p:txBody>
       </p:sp>
@@ -17902,7 +18160,7 @@
 </file>
 
 <file path=ppt/slides/slide9.xml><?xml version="1.0" encoding="utf-8"?>
-<p:sld xmlns:a="http://schemas.openxmlformats.org/drawingml/2006/main" xmlns:p="http://schemas.openxmlformats.org/presentationml/2006/main" xmlns:r="http://schemas.openxmlformats.org/officeDocument/2006/relationships">
+<p:sld xmlns:a="http://schemas.openxmlformats.org/drawingml/2006/main" xmlns:r="http://schemas.openxmlformats.org/officeDocument/2006/relationships" xmlns:p="http://schemas.openxmlformats.org/presentationml/2006/main">
   <p:cSld>
     <p:spTree>
       <p:nvGrpSpPr>
@@ -17910,7 +18168,14 @@
         <p:cNvGrpSpPr/>
         <p:nvPr/>
       </p:nvGrpSpPr>
-      <p:grpSpPr/>
+      <p:grpSpPr>
+        <a:xfrm>
+          <a:off x="0" y="0"/>
+          <a:ext cx="0" cy="0"/>
+          <a:chOff x="0" y="0"/>
+          <a:chExt cx="0" cy="0"/>
+        </a:xfrm>
+      </p:grpSpPr>
       <p:sp>
         <p:nvSpPr>
           <p:cNvPr id="2" name="Rectangle 1"/>
@@ -17951,6 +18216,7 @@
           <a:lstStyle/>
           <a:p>
             <a:pPr algn="ctr"/>
+            <a:endParaRPr/>
           </a:p>
         </p:txBody>
       </p:sp>
@@ -18029,6 +18295,7 @@
           <a:lstStyle/>
           <a:p>
             <a:pPr algn="ctr"/>
+            <a:endParaRPr/>
           </a:p>
         </p:txBody>
       </p:sp>
@@ -18107,6 +18374,7 @@
           <a:lstStyle/>
           <a:p>
             <a:pPr algn="ctr"/>
+            <a:endParaRPr/>
           </a:p>
         </p:txBody>
       </p:sp>
@@ -18150,6 +18418,7 @@
           <a:lstStyle/>
           <a:p>
             <a:pPr algn="ctr"/>
+            <a:endParaRPr/>
           </a:p>
         </p:txBody>
       </p:sp>
@@ -18266,6 +18535,7 @@
           <a:lstStyle/>
           <a:p>
             <a:pPr algn="ctr"/>
+            <a:endParaRPr/>
           </a:p>
         </p:txBody>
       </p:sp>
@@ -18309,6 +18579,7 @@
           <a:lstStyle/>
           <a:p>
             <a:pPr algn="ctr"/>
+            <a:endParaRPr/>
           </a:p>
         </p:txBody>
       </p:sp>
@@ -18425,6 +18696,7 @@
           <a:lstStyle/>
           <a:p>
             <a:pPr algn="ctr"/>
+            <a:endParaRPr/>
           </a:p>
         </p:txBody>
       </p:sp>
@@ -18468,6 +18740,7 @@
           <a:lstStyle/>
           <a:p>
             <a:pPr algn="ctr"/>
+            <a:endParaRPr/>
           </a:p>
         </p:txBody>
       </p:sp>
@@ -18584,6 +18857,7 @@
           <a:lstStyle/>
           <a:p>
             <a:pPr algn="ctr"/>
+            <a:endParaRPr/>
           </a:p>
         </p:txBody>
       </p:sp>
@@ -18627,6 +18901,7 @@
           <a:lstStyle/>
           <a:p>
             <a:pPr algn="ctr"/>
+            <a:endParaRPr/>
           </a:p>
         </p:txBody>
       </p:sp>
@@ -18743,6 +19018,7 @@
           <a:lstStyle/>
           <a:p>
             <a:pPr algn="ctr"/>
+            <a:endParaRPr/>
           </a:p>
         </p:txBody>
       </p:sp>
@@ -18821,6 +19097,7 @@
           <a:lstStyle/>
           <a:p>
             <a:pPr algn="ctr"/>
+            <a:endParaRPr/>
           </a:p>
         </p:txBody>
       </p:sp>
@@ -18899,6 +19176,7 @@
           <a:lstStyle/>
           <a:p>
             <a:pPr algn="ctr"/>
+            <a:endParaRPr/>
           </a:p>
         </p:txBody>
       </p:sp>
@@ -18977,6 +19255,7 @@
           <a:lstStyle/>
           <a:p>
             <a:pPr algn="ctr"/>
+            <a:endParaRPr/>
           </a:p>
         </p:txBody>
       </p:sp>
@@ -19055,6 +19334,7 @@
           <a:lstStyle/>
           <a:p>
             <a:pPr algn="ctr"/>
+            <a:endParaRPr/>
           </a:p>
         </p:txBody>
       </p:sp>
@@ -19133,6 +19413,7 @@
           <a:lstStyle/>
           <a:p>
             <a:pPr algn="ctr"/>
+            <a:endParaRPr/>
           </a:p>
         </p:txBody>
       </p:sp>
@@ -19211,6 +19492,7 @@
           <a:lstStyle/>
           <a:p>
             <a:pPr algn="ctr"/>
+            <a:endParaRPr/>
           </a:p>
         </p:txBody>
       </p:sp>
@@ -19324,6 +19606,7 @@
           <a:lstStyle/>
           <a:p>
             <a:pPr algn="ctr"/>
+            <a:endParaRPr/>
           </a:p>
         </p:txBody>
       </p:sp>
